--- a/docs/VOICE VAULT_AI_Architecture.pptx
+++ b/docs/VOICE VAULT_AI_Architecture.pptx
@@ -11024,7 +11024,7 @@
         </p:nvSpPr>
         <p:spPr>
           <a:xfrm>
-            <a:off x="457200" y="2103120"/>
+            <a:off x="457200" y="2121408"/>
             <a:ext cx="5394960" cy="1600200"/>
           </a:xfrm>
           <a:prstGeom prst="roundRect">
@@ -11035,7 +11035,7 @@
           </a:solidFill>
           <a:ln w="12700">
             <a:solidFill>
-              <a:srgbClr val="802020"/>
+              <a:schemeClr val="accent3"/>
             </a:solidFill>
           </a:ln>
         </p:spPr>
@@ -11071,28 +11071,28 @@
         <p:spPr>
           <a:xfrm>
             <a:off x="640080" y="2240280"/>
-            <a:ext cx="5029200" cy="365760"/>
-          </a:xfrm>
-          <a:prstGeom prst="rect">
-            <a:avLst/>
-          </a:prstGeom>
-          <a:noFill/>
-        </p:spPr>
-        <p:txBody>
-          <a:bodyPr wrap="square">
-            <a:spAutoFit/>
-          </a:bodyPr>
-          <a:lstStyle/>
-          <a:p>
-            <a:pPr algn="l"/>
-            <a:r>
-              <a:rPr sz="1300" b="1" i="0">
+            <a:ext cx="5029200" cy="292388"/>
+          </a:xfrm>
+          <a:prstGeom prst="rect">
+            <a:avLst/>
+          </a:prstGeom>
+          <a:noFill/>
+        </p:spPr>
+        <p:txBody>
+          <a:bodyPr wrap="square">
+            <a:spAutoFit/>
+          </a:bodyPr>
+          <a:lstStyle/>
+          <a:p>
+            <a:pPr algn="l"/>
+            <a:r>
+              <a:rPr sz="1300" b="1" i="0" dirty="0">
                 <a:solidFill>
                   <a:srgbClr val="F0F6FF"/>
                 </a:solidFill>
                 <a:latin typeface="Calibri"/>
               </a:rPr>
-              <a:t>🔒  No PII Guardrails</a:t>
+              <a:t>🔒  PII Guardrails</a:t>
             </a:r>
           </a:p>
         </p:txBody>
@@ -11151,7 +11151,7 @@
           </a:solidFill>
           <a:ln w="12700">
             <a:solidFill>
-              <a:srgbClr val="802020"/>
+              <a:schemeClr val="accent3"/>
             </a:solidFill>
           </a:ln>
         </p:spPr>
@@ -11267,7 +11267,7 @@
           </a:solidFill>
           <a:ln w="12700">
             <a:solidFill>
-              <a:srgbClr val="802020"/>
+              <a:schemeClr val="accent3"/>
             </a:solidFill>
           </a:ln>
         </p:spPr>
@@ -11383,7 +11383,7 @@
           </a:solidFill>
           <a:ln w="12700">
             <a:solidFill>
-              <a:srgbClr val="802020"/>
+              <a:schemeClr val="accent3"/>
             </a:solidFill>
           </a:ln>
         </p:spPr>
